--- a/data_management/figures/permissions-01.pptx
+++ b/data_management/figures/permissions-01.pptx
@@ -16101,7 +16101,7 @@
                 <a:buNone/>
               </a:pPr>
               <a:r>
-                <a:rPr lang="en-US" sz="1800">
+                <a:rPr lang="en-US" sz="1800" dirty="0">
                   <a:solidFill>
                     <a:schemeClr val="dk1"/>
                   </a:solidFill>
@@ -16110,9 +16110,9 @@
                   <a:cs typeface="Arial"/>
                   <a:sym typeface="Arial"/>
                 </a:rPr>
-                <a:t>directory</a:t>
+                <a:t>file</a:t>
               </a:r>
-              <a:endParaRPr/>
+              <a:endParaRPr dirty="0"/>
             </a:p>
           </p:txBody>
         </p:sp>
